--- a/T9917_VIT-V_Krithana.pptx
+++ b/T9917_VIT-V_Krithana.pptx
@@ -199,7 +199,7 @@
           <a:p>
             <a:fld id="{434176C1-9F12-6E47-BECF-A14CDC52B99C}" type="datetimeFigureOut">
               <a:rPr lang="en-US"/>
-              <a:t>8/27/2026</a:t>
+              <a:t>8/28/2026</a:t>
             </a:fld>
             <a:endParaRPr lang="en-US"/>
           </a:p>
@@ -1733,13 +1733,13 @@
   <p:clrMapOvr>
     <a:masterClrMapping/>
   </p:clrMapOvr>
-  <mc:AlternateContent xmlns:mc="http://schemas.openxmlformats.org/markup-compatibility/2006">
-    <mc:Choice xmlns:p159="http://schemas.microsoft.com/office/powerpoint/2015/09/main" Requires="p159">
+  <mc:AlternateContent xmlns:mc="http://schemas.openxmlformats.org/markup-compatibility/2006" xmlns:p159="http://schemas.microsoft.com/office/powerpoint/2015/09/main">
+    <mc:Choice Requires="p159">
       <p:transition xmlns:p14="http://schemas.microsoft.com/office/powerpoint/2010/main" spd="slow" p14:dur="2000">
         <p159:morph option="byObject"/>
       </p:transition>
     </mc:Choice>
-    <mc:Fallback>
+    <mc:Fallback xmlns="">
       <p:transition spd="slow">
         <p:fade/>
       </p:transition>
@@ -1943,7 +1943,7 @@
         <p:spPr>
           <a:xfrm>
             <a:off x="457200" y="1783080"/>
-            <a:ext cx="5454396" cy="4480560"/>
+            <a:ext cx="5454396" cy="4096512"/>
           </a:xfrm>
           <a:prstGeom prst="roundRect">
             <a:avLst>
@@ -2175,7 +2175,7 @@
         <p:spPr>
           <a:xfrm>
             <a:off x="6277356" y="1783080"/>
-            <a:ext cx="5454396" cy="4480560"/>
+            <a:ext cx="5454396" cy="4096512"/>
           </a:xfrm>
           <a:prstGeom prst="roundRect">
             <a:avLst>
@@ -2488,13 +2488,13 @@
   <p:clrMapOvr>
     <a:masterClrMapping/>
   </p:clrMapOvr>
-  <mc:AlternateContent xmlns:mc="http://schemas.openxmlformats.org/markup-compatibility/2006">
-    <mc:Choice xmlns:p159="http://schemas.microsoft.com/office/powerpoint/2015/09/main" Requires="p159">
+  <mc:AlternateContent xmlns:mc="http://schemas.openxmlformats.org/markup-compatibility/2006" xmlns:p159="http://schemas.microsoft.com/office/powerpoint/2015/09/main">
+    <mc:Choice Requires="p159">
       <p:transition xmlns:p14="http://schemas.microsoft.com/office/powerpoint/2010/main" spd="slow" p14:dur="2000">
-        <p159:morph option="byObject"/>
+        <p159:morph option="byWord"/>
       </p:transition>
     </mc:Choice>
-    <mc:Fallback>
+    <mc:Fallback xmlns="">
       <p:transition spd="slow">
         <p:fade/>
       </p:transition>
@@ -2623,7 +2623,7 @@
           </p:nvSpPr>
           <p:spPr>
             <a:xfrm>
-              <a:off x="307848" y="1116814"/>
+              <a:off x="307848" y="1001713"/>
               <a:ext cx="2849880" cy="256032"/>
             </a:xfrm>
             <a:prstGeom prst="rect">
@@ -2662,7 +2662,7 @@
           </p:nvSpPr>
           <p:spPr>
             <a:xfrm>
-              <a:off x="457200" y="1496151"/>
+              <a:off x="411480" y="1319119"/>
               <a:ext cx="3087624" cy="228600"/>
             </a:xfrm>
             <a:prstGeom prst="rect">
@@ -2701,7 +2701,7 @@
           </p:nvSpPr>
           <p:spPr>
             <a:xfrm>
-              <a:off x="457200" y="1770471"/>
+              <a:off x="411480" y="1524963"/>
               <a:ext cx="3087624" cy="1371600"/>
             </a:xfrm>
             <a:prstGeom prst="rect">
@@ -2716,7 +2716,7 @@
             <a:p>
               <a:pPr marL="177800" indent="-177800" algn="just">
                 <a:lnSpc>
-                  <a:spcPct val="105000"/>
+                  <a:spcPct val="100000"/>
                 </a:lnSpc>
                 <a:spcAft>
                   <a:spcPts val="500"/>
@@ -2725,17 +2725,76 @@
                 <a:buChar char="•"/>
               </a:pPr>
               <a:r>
-                <a:rPr lang="en-US" sz="1400" dirty="0">
-                  <a:solidFill>
-                    <a:srgbClr val="22303F"/>
-                  </a:solidFill>
-                  <a:latin typeface="Times New Roman" pitchFamily="34" charset="0"/>
-                  <a:ea typeface="Times New Roman" pitchFamily="34" charset="-122"/>
-                  <a:cs typeface="Times New Roman" pitchFamily="34" charset="-120"/>
+                <a:rPr lang="en-IN" sz="1400" dirty="0">
+                  <a:latin typeface="Times New Roman" panose="02020603050405020304" pitchFamily="18" charset="0"/>
+                  <a:cs typeface="Times New Roman" panose="02020603050405020304" pitchFamily="18" charset="0"/>
                 </a:rPr>
-                <a:t>Indian Kanoon (public judgments)</a:t>
+                <a:t>AWS Open Data Registry (SC + HC)</a:t>
               </a:r>
-              <a:endParaRPr lang="en-US" sz="1400" dirty="0"/>
+              <a:endParaRPr lang="en-US" sz="1400" dirty="0">
+                <a:latin typeface="Times New Roman" panose="02020603050405020304" pitchFamily="18" charset="0"/>
+                <a:cs typeface="Times New Roman" panose="02020603050405020304" pitchFamily="18" charset="0"/>
+              </a:endParaRPr>
+            </a:p>
+            <a:p>
+              <a:pPr marL="177800" indent="-177800" algn="just">
+                <a:lnSpc>
+                  <a:spcPct val="100000"/>
+                </a:lnSpc>
+                <a:spcAft>
+                  <a:spcPts val="500"/>
+                </a:spcAft>
+                <a:buSzPct val="100000"/>
+                <a:buChar char="•"/>
+              </a:pPr>
+              <a:r>
+                <a:rPr lang="en-IN" sz="1400" dirty="0">
+                  <a:latin typeface="Times New Roman" panose="02020603050405020304" pitchFamily="18" charset="0"/>
+                  <a:cs typeface="Times New Roman" panose="02020603050405020304" pitchFamily="18" charset="0"/>
+                </a:rPr>
+                <a:t>IL-TUR &amp; </a:t>
+              </a:r>
+              <a:r>
+                <a:rPr lang="en-IN" sz="1400" dirty="0" err="1">
+                  <a:latin typeface="Times New Roman" panose="02020603050405020304" pitchFamily="18" charset="0"/>
+                  <a:cs typeface="Times New Roman" panose="02020603050405020304" pitchFamily="18" charset="0"/>
+                </a:rPr>
+                <a:t>LawSum</a:t>
+              </a:r>
+              <a:r>
+                <a:rPr lang="en-IN" sz="1400" dirty="0">
+                  <a:latin typeface="Times New Roman" panose="02020603050405020304" pitchFamily="18" charset="0"/>
+                  <a:cs typeface="Times New Roman" panose="02020603050405020304" pitchFamily="18" charset="0"/>
+                </a:rPr>
+                <a:t> (validation)</a:t>
+              </a:r>
+              <a:endParaRPr lang="en-US" sz="1400" dirty="0">
+                <a:latin typeface="Times New Roman" panose="02020603050405020304" pitchFamily="18" charset="0"/>
+                <a:cs typeface="Times New Roman" panose="02020603050405020304" pitchFamily="18" charset="0"/>
+              </a:endParaRPr>
+            </a:p>
+            <a:p>
+              <a:pPr marL="177800" indent="-177800" algn="just">
+                <a:lnSpc>
+                  <a:spcPct val="100000"/>
+                </a:lnSpc>
+                <a:spcAft>
+                  <a:spcPts val="500"/>
+                </a:spcAft>
+                <a:buSzPct val="100000"/>
+                <a:buChar char="•"/>
+              </a:pPr>
+              <a:r>
+                <a:rPr lang="en-IN" sz="1400" dirty="0">
+                  <a:latin typeface="Times New Roman" panose="02020603050405020304" pitchFamily="18" charset="0"/>
+                  <a:cs typeface="Times New Roman" panose="02020603050405020304" pitchFamily="18" charset="0"/>
+                </a:rPr>
+                <a:t>ILDC (benchmark)</a:t>
+              </a:r>
+              <a:endParaRPr lang="en-US" sz="1400" dirty="0">
+                <a:latin typeface="Times New Roman" panose="02020603050405020304" pitchFamily="18" charset="0"/>
+                <a:cs typeface="Times New Roman" panose="02020603050405020304" pitchFamily="18" charset="0"/>
+              </a:endParaRPr>
             </a:p>
             <a:p>
               <a:pPr marL="177800" indent="-177800" algn="just">
@@ -2750,57 +2809,6 @@
               </a:pPr>
               <a:r>
                 <a:rPr lang="en-US" sz="1400" dirty="0">
-                  <a:solidFill>
-                    <a:srgbClr val="22303F"/>
-                  </a:solidFill>
-                  <a:latin typeface="Times New Roman" pitchFamily="34" charset="0"/>
-                  <a:ea typeface="Times New Roman" pitchFamily="34" charset="-122"/>
-                  <a:cs typeface="Times New Roman" pitchFamily="34" charset="-120"/>
-                </a:rPr>
-                <a:t>Supreme Court of India judgments</a:t>
-              </a:r>
-              <a:endParaRPr lang="en-US" sz="1400" dirty="0"/>
-            </a:p>
-            <a:p>
-              <a:pPr marL="177800" indent="-177800" algn="just">
-                <a:lnSpc>
-                  <a:spcPct val="105000"/>
-                </a:lnSpc>
-                <a:spcAft>
-                  <a:spcPts val="500"/>
-                </a:spcAft>
-                <a:buSzPct val="100000"/>
-                <a:buChar char="•"/>
-              </a:pPr>
-              <a:r>
-                <a:rPr lang="en-US" sz="1400" dirty="0">
-                  <a:solidFill>
-                    <a:srgbClr val="22303F"/>
-                  </a:solidFill>
-                  <a:latin typeface="Times New Roman" pitchFamily="34" charset="0"/>
-                  <a:ea typeface="Times New Roman" pitchFamily="34" charset="-122"/>
-                  <a:cs typeface="Times New Roman" pitchFamily="34" charset="-120"/>
-                </a:rPr>
-                <a:t>High Court judgments</a:t>
-              </a:r>
-              <a:endParaRPr lang="en-US" sz="1400" dirty="0"/>
-            </a:p>
-            <a:p>
-              <a:pPr marL="177800" indent="-177800" algn="just">
-                <a:lnSpc>
-                  <a:spcPct val="105000"/>
-                </a:lnSpc>
-                <a:spcAft>
-                  <a:spcPts val="500"/>
-                </a:spcAft>
-                <a:buSzPct val="100000"/>
-                <a:buChar char="•"/>
-              </a:pPr>
-              <a:r>
-                <a:rPr lang="en-US" sz="1400" dirty="0">
-                  <a:solidFill>
-                    <a:srgbClr val="22303F"/>
-                  </a:solidFill>
                   <a:latin typeface="Times New Roman" pitchFamily="34" charset="0"/>
                   <a:ea typeface="Times New Roman" pitchFamily="34" charset="-122"/>
                   <a:cs typeface="Times New Roman" pitchFamily="34" charset="-120"/>
@@ -2819,7 +2827,7 @@
           </p:nvSpPr>
           <p:spPr>
             <a:xfrm>
-              <a:off x="457200" y="3233511"/>
+              <a:off x="342900" y="2958321"/>
               <a:ext cx="3087624" cy="228600"/>
             </a:xfrm>
             <a:prstGeom prst="rect">
@@ -2933,7 +2941,7 @@
           </p:nvSpPr>
           <p:spPr>
             <a:xfrm>
-              <a:off x="4277175" y="1474296"/>
+              <a:off x="4230624" y="1423677"/>
               <a:ext cx="3087624" cy="201168"/>
             </a:xfrm>
             <a:prstGeom prst="rect">
@@ -2972,7 +2980,7 @@
           </p:nvSpPr>
           <p:spPr>
             <a:xfrm>
-              <a:off x="4550664" y="1569303"/>
+              <a:off x="4524202" y="1609273"/>
               <a:ext cx="3087624" cy="457200"/>
             </a:xfrm>
             <a:prstGeom prst="rect">
@@ -2994,7 +3002,7 @@
                   <a:ea typeface="Times New Roman" pitchFamily="34" charset="-122"/>
                   <a:cs typeface="Times New Roman" pitchFamily="34" charset="-120"/>
                 </a:rPr>
-                <a:t>BeautifulSoup</a:t>
+                <a:t>PyMuPDF</a:t>
               </a:r>
               <a:r>
                 <a:rPr lang="en-US" sz="1400" dirty="0">
@@ -3005,7 +3013,29 @@
                   <a:ea typeface="Times New Roman" pitchFamily="34" charset="-122"/>
                   <a:cs typeface="Times New Roman" pitchFamily="34" charset="-120"/>
                 </a:rPr>
-                <a:t>, PyMuPDF, pdfplumber</a:t>
+                <a:t>, </a:t>
+              </a:r>
+              <a:r>
+                <a:rPr lang="en-US" sz="1400" dirty="0" err="1">
+                  <a:solidFill>
+                    <a:srgbClr val="22303F"/>
+                  </a:solidFill>
+                  <a:latin typeface="Times New Roman" pitchFamily="34" charset="0"/>
+                  <a:ea typeface="Times New Roman" pitchFamily="34" charset="-122"/>
+                  <a:cs typeface="Times New Roman" pitchFamily="34" charset="-120"/>
+                </a:rPr>
+                <a:t>pdfplumber,AWS</a:t>
+              </a:r>
+              <a:r>
+                <a:rPr lang="en-US" sz="1400" dirty="0">
+                  <a:solidFill>
+                    <a:srgbClr val="22303F"/>
+                  </a:solidFill>
+                  <a:latin typeface="Times New Roman" pitchFamily="34" charset="0"/>
+                  <a:ea typeface="Times New Roman" pitchFamily="34" charset="-122"/>
+                  <a:cs typeface="Times New Roman" pitchFamily="34" charset="-120"/>
+                </a:rPr>
+                <a:t> CLI (S3 sync)</a:t>
               </a:r>
               <a:endParaRPr lang="en-US" sz="1400" dirty="0"/>
             </a:p>
@@ -3712,7 +3742,7 @@
         </p:nvSpPr>
         <p:spPr>
           <a:xfrm>
-            <a:off x="457200" y="3507831"/>
+            <a:off x="411480" y="3258585"/>
             <a:ext cx="3087624" cy="2240280"/>
           </a:xfrm>
           <a:prstGeom prst="rect">
@@ -3727,7 +3757,7 @@
           <a:p>
             <a:pPr marL="177800" indent="-177800">
               <a:lnSpc>
-                <a:spcPct val="105000"/>
+                <a:spcPct val="100000"/>
               </a:lnSpc>
               <a:spcAft>
                 <a:spcPts val="500"/>
@@ -3736,17 +3766,17 @@
               <a:buChar char="•"/>
             </a:pPr>
             <a:r>
-              <a:rPr lang="en-US" sz="1400" dirty="0">
-                <a:solidFill>
-                  <a:srgbClr val="22303F"/>
-                </a:solidFill>
-                <a:latin typeface="Times New Roman" pitchFamily="34" charset="0"/>
-                <a:ea typeface="Times New Roman" pitchFamily="34" charset="-122"/>
-                <a:cs typeface="Times New Roman" pitchFamily="34" charset="-120"/>
-              </a:rPr>
-              <a:t>Collected via web scraping and document parsing</a:t>
-            </a:r>
-            <a:endParaRPr lang="en-US" sz="1400" dirty="0"/>
+              <a:rPr lang="en-IN" sz="1400" dirty="0">
+                <a:latin typeface="Times New Roman" panose="02020603050405020304" pitchFamily="18" charset="0"/>
+                <a:cs typeface="Times New Roman" panose="02020603050405020304" pitchFamily="18" charset="0"/>
+              </a:rPr>
+              <a:t>Collected via AWS S3 sync (public bucket)</a:t>
+            </a:r>
+            <a:endParaRPr lang="en-US" sz="1400" dirty="0">
+              <a:latin typeface="Times New Roman" panose="02020603050405020304" pitchFamily="18" charset="0"/>
+              <a:ea typeface="Times New Roman" pitchFamily="34" charset="-122"/>
+              <a:cs typeface="Times New Roman" panose="02020603050405020304" pitchFamily="18" charset="0"/>
+            </a:endParaRPr>
           </a:p>
           <a:p>
             <a:pPr marL="177800" indent="-177800">
@@ -3761,9 +3791,6 @@
             </a:pPr>
             <a:r>
               <a:rPr lang="en-US" sz="1400" dirty="0">
-                <a:solidFill>
-                  <a:srgbClr val="22303F"/>
-                </a:solidFill>
                 <a:latin typeface="Times New Roman" pitchFamily="34" charset="0"/>
                 <a:ea typeface="Times New Roman" pitchFamily="34" charset="-122"/>
                 <a:cs typeface="Times New Roman" pitchFamily="34" charset="-120"/>
@@ -3785,9 +3812,6 @@
             </a:pPr>
             <a:r>
               <a:rPr lang="en-US" sz="1400" dirty="0">
-                <a:solidFill>
-                  <a:srgbClr val="22303F"/>
-                </a:solidFill>
                 <a:latin typeface="Times New Roman" pitchFamily="34" charset="0"/>
                 <a:ea typeface="Times New Roman" pitchFamily="34" charset="-122"/>
                 <a:cs typeface="Times New Roman" pitchFamily="34" charset="-120"/>
@@ -3803,13 +3827,13 @@
   <p:clrMapOvr>
     <a:masterClrMapping/>
   </p:clrMapOvr>
-  <mc:AlternateContent xmlns:mc="http://schemas.openxmlformats.org/markup-compatibility/2006">
-    <mc:Choice xmlns:p159="http://schemas.microsoft.com/office/powerpoint/2015/09/main" Requires="p159">
+  <mc:AlternateContent xmlns:mc="http://schemas.openxmlformats.org/markup-compatibility/2006" xmlns:p159="http://schemas.microsoft.com/office/powerpoint/2015/09/main">
+    <mc:Choice Requires="p159">
       <p:transition xmlns:p14="http://schemas.microsoft.com/office/powerpoint/2010/main" spd="slow" p14:dur="2000">
         <p159:morph option="byObject"/>
       </p:transition>
     </mc:Choice>
-    <mc:Fallback>
+    <mc:Fallback xmlns="">
       <p:transition spd="slow">
         <p:fade/>
       </p:transition>
@@ -4608,13 +4632,13 @@
   <p:clrMapOvr>
     <a:masterClrMapping/>
   </p:clrMapOvr>
-  <mc:AlternateContent xmlns:mc="http://schemas.openxmlformats.org/markup-compatibility/2006">
-    <mc:Choice xmlns:p159="http://schemas.microsoft.com/office/powerpoint/2015/09/main" Requires="p159">
+  <mc:AlternateContent xmlns:mc="http://schemas.openxmlformats.org/markup-compatibility/2006" xmlns:p159="http://schemas.microsoft.com/office/powerpoint/2015/09/main">
+    <mc:Choice Requires="p159">
       <p:transition xmlns:p14="http://schemas.microsoft.com/office/powerpoint/2010/main" spd="slow" p14:dur="2000">
         <p159:morph option="byObject"/>
       </p:transition>
     </mc:Choice>
-    <mc:Fallback>
+    <mc:Fallback xmlns="">
       <p:transition spd="slow">
         <p:fade/>
       </p:transition>
@@ -5539,13 +5563,13 @@
   <p:clrMapOvr>
     <a:masterClrMapping/>
   </p:clrMapOvr>
-  <mc:AlternateContent xmlns:mc="http://schemas.openxmlformats.org/markup-compatibility/2006">
-    <mc:Choice xmlns:p159="http://schemas.microsoft.com/office/powerpoint/2015/09/main" Requires="p159">
+  <mc:AlternateContent xmlns:mc="http://schemas.openxmlformats.org/markup-compatibility/2006" xmlns:p159="http://schemas.microsoft.com/office/powerpoint/2015/09/main">
+    <mc:Choice Requires="p159">
       <p:transition xmlns:p14="http://schemas.microsoft.com/office/powerpoint/2010/main" spd="slow" p14:dur="2000">
         <p159:morph option="byObject"/>
       </p:transition>
     </mc:Choice>
-    <mc:Fallback>
+    <mc:Fallback xmlns="">
       <p:transition spd="slow">
         <p:fade/>
       </p:transition>
@@ -5722,13 +5746,13 @@
   <p:clrMapOvr>
     <a:masterClrMapping/>
   </p:clrMapOvr>
-  <mc:AlternateContent xmlns:mc="http://schemas.openxmlformats.org/markup-compatibility/2006">
-    <mc:Choice xmlns:p159="http://schemas.microsoft.com/office/powerpoint/2015/09/main" Requires="p159">
+  <mc:AlternateContent xmlns:mc="http://schemas.openxmlformats.org/markup-compatibility/2006" xmlns:p159="http://schemas.microsoft.com/office/powerpoint/2015/09/main">
+    <mc:Choice Requires="p159">
       <p:transition xmlns:p14="http://schemas.microsoft.com/office/powerpoint/2010/main" spd="slow" p14:dur="2000">
         <p159:morph option="byObject"/>
       </p:transition>
     </mc:Choice>
-    <mc:Fallback>
+    <mc:Fallback xmlns="">
       <p:transition spd="slow">
         <p:fade/>
       </p:transition>
